--- a/source/galois_theory_intro_ja_v1_12.pptx
+++ b/source/galois_theory_intro_ja_v1_12.pptx
@@ -11469,7 +11469,7 @@
                 <a:ea typeface="Noto Sans CJK JP"/>
                 <a:cs typeface="Noto Sans CJK JP" pitchFamily="34" charset="-120"/>
               </a:rPr>
-              <a:t>∀r, ∀σ∈G :  r(α₁,…,αₙ)∈Q  ⟹  σ( r(α₁,…,αₙ) )∈Q</a:t>
+              <a:t>∀r, ∀σ∈G :  r(α₁,…,αₙ)∈Q  ⇒  σ( r(α₁,…,αₙ) )∈Q</a:t>
             </a:r>
             <a:endParaRPr lang="en-US" sz="2100" dirty="0"/>
           </a:p>
@@ -12292,7 +12292,7 @@
                 <a:ea typeface="Noto Sans CJK JP"/>
                 <a:cs typeface="Noto Sans CJK JP" pitchFamily="34" charset="-120"/>
               </a:rPr>
-              <a:t>L ⟼ Gal(K/L) = Aut(K/L) = { σ∈G : σ(x)=x (∀x∈L) }</a:t>
+              <a:t>L ↦ Gal(K/L) = Aut(K/L) = { σ∈G : σ(x)=x (∀x∈L) }</a:t>
             </a:r>
             <a:endParaRPr lang="en-US" sz="1450" dirty="0"/>
           </a:p>
